--- a/m4/diapositivos/sessao-01-m4-f01.pptx
+++ b/m4/diapositivos/sessao-01-m4-f01.pptx
@@ -4215,7 +4215,35 @@
                 <a:ea typeface="Arial" pitchFamily="34" charset="-122"/>
                 <a:cs typeface="Arial" pitchFamily="34" charset="-120"/>
               </a:rPr>
-              <a:t>Padre António Vieira, Sermão de Santo António (1654), ortografia atualizada, cap. I. Vieira conta o que fez Santo António em Rimini, e é isso que ele próprio vai fazer em São Luís.</a:t>
+              <a:t>Padre António Vieira, </a:t>
+            </a:r>
+            <a:pPr indent="0" marL="0">
+              <a:buNone/>
+            </a:pPr>
+            <a:r>
+              <a:rPr lang="en-US" sz="1200" i="1" dirty="0">
+                <a:solidFill>
+                  <a:srgbClr val="A9A79F"/>
+                </a:solidFill>
+                <a:latin typeface="Arial" pitchFamily="34" charset="0"/>
+                <a:ea typeface="Arial" pitchFamily="34" charset="-122"/>
+                <a:cs typeface="Arial" pitchFamily="34" charset="-120"/>
+              </a:rPr>
+              <a:t>Sermão de Santo António</a:t>
+            </a:r>
+            <a:pPr indent="0" marL="0">
+              <a:buNone/>
+            </a:pPr>
+            <a:r>
+              <a:rPr lang="en-US" sz="1200" dirty="0">
+                <a:solidFill>
+                  <a:srgbClr val="A9A79F"/>
+                </a:solidFill>
+                <a:latin typeface="Arial" pitchFamily="34" charset="0"/>
+                <a:ea typeface="Arial" pitchFamily="34" charset="-122"/>
+                <a:cs typeface="Arial" pitchFamily="34" charset="-120"/>
+              </a:rPr>
+              <a:t> (1654), ortografia atualizada, cap. I. Vieira conta o que fez Santo António em Rimini, e é isso que ele próprio vai fazer em São Luís.</a:t>
             </a:r>
             <a:endParaRPr lang="en-US" sz="1200" dirty="0"/>
           </a:p>
@@ -4535,7 +4563,35 @@
                 <a:ea typeface="Arial" pitchFamily="34" charset="-122"/>
                 <a:cs typeface="Arial" pitchFamily="34" charset="-120"/>
               </a:rPr>
-              <a:t>Padre António Vieira, Sermão de Santo António (1654), ortografia atualizada, cap. I. Vieira conta o que fez Santo António em Rimini, e é isso que ele próprio vai fazer em São Luís.</a:t>
+              <a:t>Padre António Vieira, </a:t>
+            </a:r>
+            <a:pPr indent="0" marL="0">
+              <a:buNone/>
+            </a:pPr>
+            <a:r>
+              <a:rPr lang="en-US" sz="1200" i="1" dirty="0">
+                <a:solidFill>
+                  <a:srgbClr val="A9A79F"/>
+                </a:solidFill>
+                <a:latin typeface="Arial" pitchFamily="34" charset="0"/>
+                <a:ea typeface="Arial" pitchFamily="34" charset="-122"/>
+                <a:cs typeface="Arial" pitchFamily="34" charset="-120"/>
+              </a:rPr>
+              <a:t>Sermão de Santo António</a:t>
+            </a:r>
+            <a:pPr indent="0" marL="0">
+              <a:buNone/>
+            </a:pPr>
+            <a:r>
+              <a:rPr lang="en-US" sz="1200" dirty="0">
+                <a:solidFill>
+                  <a:srgbClr val="A9A79F"/>
+                </a:solidFill>
+                <a:latin typeface="Arial" pitchFamily="34" charset="0"/>
+                <a:ea typeface="Arial" pitchFamily="34" charset="-122"/>
+                <a:cs typeface="Arial" pitchFamily="34" charset="-120"/>
+              </a:rPr>
+              <a:t> (1654), ortografia atualizada, cap. I. Vieira conta o que fez Santo António em Rimini, e é isso que ele próprio vai fazer em São Luís.</a:t>
             </a:r>
             <a:endParaRPr lang="en-US" sz="1200" dirty="0"/>
           </a:p>
@@ -4942,7 +4998,41 @@
                 <a:ea typeface="Arial" pitchFamily="34" charset="-122"/>
                 <a:cs typeface="Arial" pitchFamily="34" charset="-120"/>
               </a:rPr>
-              <a:t>António Vieira (Lisboa, 1608 – Bahia, 1697), jesuíta, pregou o Sermão de Santo António em São Luís do Maranhão a 13 de junho de 1654, três dias antes de embarcar para Lisboa, onde ia defender os indígenas.</a:t>
+              <a:t>António Vieira (Lisboa, 1608 – Bahia, 1697), jesuíta, pregou o </a:t>
+            </a:r>
+            <a:pPr indent="0" marL="0">
+              <a:lnSpc>
+                <a:spcPct val="105000"/>
+              </a:lnSpc>
+              <a:buNone/>
+            </a:pPr>
+            <a:r>
+              <a:rPr lang="en-US" sz="2200" i="1" dirty="0">
+                <a:solidFill>
+                  <a:srgbClr val="F2F0EA"/>
+                </a:solidFill>
+                <a:latin typeface="Arial" pitchFamily="34" charset="0"/>
+                <a:ea typeface="Arial" pitchFamily="34" charset="-122"/>
+                <a:cs typeface="Arial" pitchFamily="34" charset="-120"/>
+              </a:rPr>
+              <a:t>Sermão de Santo António</a:t>
+            </a:r>
+            <a:pPr indent="0" marL="0">
+              <a:lnSpc>
+                <a:spcPct val="105000"/>
+              </a:lnSpc>
+              <a:buNone/>
+            </a:pPr>
+            <a:r>
+              <a:rPr lang="en-US" sz="2200" dirty="0">
+                <a:solidFill>
+                  <a:srgbClr val="F2F0EA"/>
+                </a:solidFill>
+                <a:latin typeface="Arial" pitchFamily="34" charset="0"/>
+                <a:ea typeface="Arial" pitchFamily="34" charset="-122"/>
+                <a:cs typeface="Arial" pitchFamily="34" charset="-120"/>
+              </a:rPr>
+              <a:t> em São Luís do Maranhão a 13 de junho de 1654, três dias antes de embarcar para Lisboa, onde ia defender os indígenas.</a:t>
             </a:r>
             <a:endParaRPr lang="en-US" sz="2200" dirty="0"/>
           </a:p>
@@ -5629,6 +5719,20 @@
                         <a:buNone/>
                       </a:pPr>
                       <a:r>
+                        <a:rPr lang="en-US" sz="1800" i="1" dirty="0">
+                          <a:solidFill>
+                            <a:srgbClr val="F2F0EA"/>
+                          </a:solidFill>
+                          <a:latin typeface="Arial" pitchFamily="34" charset="0"/>
+                          <a:ea typeface="Arial" pitchFamily="34" charset="-122"/>
+                          <a:cs typeface="Arial" pitchFamily="34" charset="-120"/>
+                        </a:rPr>
+                        <a:t>Sermão de Santo António</a:t>
+                      </a:r>
+                      <a:pPr indent="0" marL="0">
+                        <a:buNone/>
+                      </a:pPr>
+                      <a:r>
                         <a:rPr lang="en-US" sz="1800" dirty="0">
                           <a:solidFill>
                             <a:srgbClr val="F2F0EA"/>
@@ -5637,7 +5741,7 @@
                           <a:ea typeface="Arial" pitchFamily="34" charset="-122"/>
                           <a:cs typeface="Arial" pitchFamily="34" charset="-120"/>
                         </a:rPr>
-                        <a:t>Sermão de Santo António (1654)</a:t>
+                        <a:t> (1654)</a:t>
                       </a:r>
                       <a:endParaRPr lang="en-US" sz="1800" dirty="0">
                         <a:latin typeface="Arial" charset="0"/>
